--- a/events/2026/02/11/figures/Marcos.pptx
+++ b/events/2026/02/11/figures/Marcos.pptx
@@ -13408,14 +13408,19 @@
           <a:p>
             <a:r>
               <a:rPr lang="fr-FR" dirty="0"/>
-              <a:t>Auteur 1</a:t>
+              <a:t>Marcos Maldonado</a:t>
             </a:r>
           </a:p>
           <a:p>
             <a:r>
               <a:rPr lang="fr-FR" dirty="0"/>
-              <a:t>Auteur 2</a:t>
-            </a:r>
+              <a:t>PhD </a:t>
+            </a:r>
+            <a:r>
+              <a:rPr lang="fr-FR" dirty="0" err="1"/>
+              <a:t>Student</a:t>
+            </a:r>
+            <a:endParaRPr lang="fr-FR" dirty="0"/>
           </a:p>
         </p:txBody>
       </p:sp>
